--- a/slides-by-us/IntroPaP-2026.pptx
+++ b/slides-by-us/IntroPaP-2026.pptx
@@ -234,7 +234,7 @@
           <a:p>
             <a:fld id="{19C334B4-43C6-47FF-AFC7-2EEDB0EE66F7}" type="datetimeFigureOut">
               <a:rPr lang="en-US" smtClean="0"/>
-              <a:t>2026-04-14</a:t>
+              <a:t>2026-04-15</a:t>
             </a:fld>
             <a:endParaRPr lang="en-US"/>
           </a:p>
@@ -1937,7 +1937,7 @@
           <a:p>
             <a:fld id="{08C46021-58C3-4E5D-8BBB-4314F2568516}" type="datetime1">
               <a:rPr lang="en-US" smtClean="0"/>
-              <a:t>2026-04-14</a:t>
+              <a:t>2026-04-15</a:t>
             </a:fld>
             <a:endParaRPr lang="en-US"/>
           </a:p>
@@ -2102,7 +2102,7 @@
           <a:p>
             <a:fld id="{B77CF43D-0ED1-4F29-8E1D-57BE7B33A4CE}" type="datetime1">
               <a:rPr lang="en-US" smtClean="0"/>
-              <a:t>2026-04-14</a:t>
+              <a:t>2026-04-15</a:t>
             </a:fld>
             <a:endParaRPr lang="en-US"/>
           </a:p>
@@ -2277,7 +2277,7 @@
           <a:p>
             <a:fld id="{7942BCD8-AC7F-41EA-AADA-21D27CA8744F}" type="datetime1">
               <a:rPr lang="en-US" smtClean="0"/>
-              <a:t>2026-04-14</a:t>
+              <a:t>2026-04-15</a:t>
             </a:fld>
             <a:endParaRPr lang="en-US"/>
           </a:p>
@@ -2442,7 +2442,7 @@
           <a:p>
             <a:fld id="{E93AB0D8-CAA7-4329-BBEE-2722B0535505}" type="datetime1">
               <a:rPr lang="en-US" smtClean="0"/>
-              <a:t>2026-04-14</a:t>
+              <a:t>2026-04-15</a:t>
             </a:fld>
             <a:endParaRPr lang="en-US"/>
           </a:p>
@@ -2683,7 +2683,7 @@
           <a:p>
             <a:fld id="{C3DBB950-6BB1-4F84-8BB1-8261E03229D7}" type="datetime1">
               <a:rPr lang="en-US" smtClean="0"/>
-              <a:t>2026-04-14</a:t>
+              <a:t>2026-04-15</a:t>
             </a:fld>
             <a:endParaRPr lang="en-US"/>
           </a:p>
@@ -2966,7 +2966,7 @@
           <a:p>
             <a:fld id="{C7C43E42-D0E6-44FB-B701-FD74B390060D}" type="datetime1">
               <a:rPr lang="en-US" smtClean="0"/>
-              <a:t>2026-04-14</a:t>
+              <a:t>2026-04-15</a:t>
             </a:fld>
             <a:endParaRPr lang="en-US"/>
           </a:p>
@@ -3383,7 +3383,7 @@
           <a:p>
             <a:fld id="{785372E4-3D07-4C00-BCD2-0C4366E79F13}" type="datetime1">
               <a:rPr lang="en-US" smtClean="0"/>
-              <a:t>2026-04-14</a:t>
+              <a:t>2026-04-15</a:t>
             </a:fld>
             <a:endParaRPr lang="en-US"/>
           </a:p>
@@ -3496,7 +3496,7 @@
           <a:p>
             <a:fld id="{1AE57863-361C-4082-9348-6A60EAF4CF78}" type="datetime1">
               <a:rPr lang="en-US" smtClean="0"/>
-              <a:t>2026-04-14</a:t>
+              <a:t>2026-04-15</a:t>
             </a:fld>
             <a:endParaRPr lang="en-US"/>
           </a:p>
@@ -3586,7 +3586,7 @@
           <a:p>
             <a:fld id="{20AEC4AD-9339-4E3E-BA65-ACDE4A64233E}" type="datetime1">
               <a:rPr lang="en-US" smtClean="0"/>
-              <a:t>2026-04-14</a:t>
+              <a:t>2026-04-15</a:t>
             </a:fld>
             <a:endParaRPr lang="en-US"/>
           </a:p>
@@ -3858,7 +3858,7 @@
           <a:p>
             <a:fld id="{4D703CB3-1185-4EB7-94FC-026336EF999E}" type="datetime1">
               <a:rPr lang="en-US" smtClean="0"/>
-              <a:t>2026-04-14</a:t>
+              <a:t>2026-04-15</a:t>
             </a:fld>
             <a:endParaRPr lang="en-US"/>
           </a:p>
@@ -4106,7 +4106,7 @@
           <a:p>
             <a:fld id="{25AC0514-54E2-464B-829E-09FA4B9C1B21}" type="datetime1">
               <a:rPr lang="en-US" smtClean="0"/>
-              <a:t>2026-04-14</a:t>
+              <a:t>2026-04-15</a:t>
             </a:fld>
             <a:endParaRPr lang="en-US"/>
           </a:p>
@@ -4314,7 +4314,7 @@
           <a:p>
             <a:fld id="{7B1F7E12-C93A-4B3A-BC88-E4170706B5A5}" type="datetime1">
               <a:rPr lang="en-US" smtClean="0"/>
-              <a:t>2026-04-14</a:t>
+              <a:t>2026-04-15</a:t>
             </a:fld>
             <a:endParaRPr lang="en-US"/>
           </a:p>
@@ -5699,15 +5699,7 @@
                   <a:prstClr val="black"/>
                 </a:solidFill>
               </a:rPr>
-              <a:t> smart </a:t>
-            </a:r>
-            <a:r>
-              <a:rPr lang="en-US" sz="1600" dirty="0" smtClean="0">
-                <a:solidFill>
-                  <a:prstClr val="black"/>
-                </a:solidFill>
-              </a:rPr>
-              <a:t>contracts</a:t>
+              <a:t> smart contracts</a:t>
             </a:r>
             <a:br>
               <a:rPr lang="en-US" sz="1600" dirty="0" smtClean="0">
@@ -5722,23 +5714,7 @@
                   <a:prstClr val="black"/>
                 </a:solidFill>
               </a:rPr>
-              <a:t>to cross-chain </a:t>
-            </a:r>
-            <a:r>
-              <a:rPr lang="en-US" sz="1600" dirty="0" smtClean="0">
-                <a:solidFill>
-                  <a:prstClr val="black"/>
-                </a:solidFill>
-              </a:rPr>
-              <a:t>contracts and </a:t>
-            </a:r>
-            <a:r>
-              <a:rPr lang="en-US" sz="1600" dirty="0" smtClean="0">
-                <a:solidFill>
-                  <a:prstClr val="black"/>
-                </a:solidFill>
-              </a:rPr>
-              <a:t>protocols</a:t>
+              <a:t>to cross-chain contracts and protocols</a:t>
             </a:r>
             <a:endParaRPr lang="en-US" sz="1600" dirty="0">
               <a:solidFill>
@@ -6381,11 +6357,7 @@
           <a:p>
             <a:r>
               <a:rPr lang="en-US" b="1" dirty="0" smtClean="0"/>
-              <a:t>Secure </a:t>
-            </a:r>
-            <a:r>
-              <a:rPr lang="en-US" b="1" dirty="0" smtClean="0"/>
-              <a:t>information flow</a:t>
+              <a:t>Secure information flow</a:t>
             </a:r>
             <a:endParaRPr lang="en-US" b="1" dirty="0"/>
           </a:p>
@@ -6636,13 +6608,8 @@
             </a:br>
             <a:r>
               <a:rPr lang="en-US" sz="1800" dirty="0" smtClean="0"/>
-              <a:t>but less efficient and </a:t>
-            </a:r>
-            <a:r>
-              <a:rPr lang="en-US" sz="1800" dirty="0" smtClean="0"/>
-              <a:t>less correct</a:t>
-            </a:r>
-            <a:endParaRPr lang="en-US" sz="1800" dirty="0" smtClean="0"/>
+              <a:t>but less efficient and less correct</a:t>
+            </a:r>
           </a:p>
         </p:txBody>
       </p:sp>
@@ -8405,15 +8372,7 @@
                   <a:srgbClr val="C00000"/>
                 </a:solidFill>
               </a:rPr>
-              <a:t> </a:t>
-            </a:r>
-            <a:r>
-              <a:rPr lang="en-US" sz="2000" b="1" dirty="0" smtClean="0">
-                <a:solidFill>
-                  <a:srgbClr val="C00000"/>
-                </a:solidFill>
-              </a:rPr>
-              <a:t>security </a:t>
+              <a:t> security </a:t>
             </a:r>
             <a:r>
               <a:rPr lang="en-US" sz="1800" dirty="0" smtClean="0">
@@ -8424,40 +8383,7 @@
                   </a:schemeClr>
                 </a:solidFill>
               </a:rPr>
-              <a:t>(Cătălin</a:t>
-            </a:r>
-            <a:r>
-              <a:rPr lang="en-US" sz="1800" dirty="0" smtClean="0">
-                <a:solidFill>
-                  <a:schemeClr val="tx1">
-                    <a:lumMod val="65000"/>
-                    <a:lumOff val="35000"/>
-                  </a:schemeClr>
-                </a:solidFill>
-              </a:rPr>
-              <a:t>, Yonghyun, </a:t>
-            </a:r>
-            <a:r>
-              <a:rPr lang="en-US" sz="1800" dirty="0" smtClean="0">
-                <a:solidFill>
-                  <a:schemeClr val="tx1">
-                    <a:lumMod val="65000"/>
-                    <a:lumOff val="35000"/>
-                  </a:schemeClr>
-                </a:solidFill>
-              </a:rPr>
-              <a:t>Yan, </a:t>
-            </a:r>
-            <a:r>
-              <a:rPr lang="en-US" sz="1800" dirty="0" smtClean="0">
-                <a:solidFill>
-                  <a:schemeClr val="tx1">
-                    <a:lumMod val="65000"/>
-                    <a:lumOff val="35000"/>
-                  </a:schemeClr>
-                </a:solidFill>
-              </a:rPr>
-              <a:t>et </a:t>
+              <a:t>(Cătălin, Yonghyun, Yan, et </a:t>
             </a:r>
             <a:r>
               <a:rPr lang="en-US" sz="1800" dirty="0">
@@ -8529,11 +8455,7 @@
             </a:r>
             <a:r>
               <a:rPr lang="en-US" sz="1400" dirty="0" smtClean="0"/>
-              <a:t>that </a:t>
-            </a:r>
-            <a:r>
-              <a:rPr lang="en-US" sz="1400" dirty="0" smtClean="0"/>
-              <a:t>prevents leaks in speculative executions</a:t>
+              <a:t>that prevents leaks in speculative executions</a:t>
             </a:r>
           </a:p>
           <a:p>
@@ -9119,15 +9041,7 @@
             <a:pPr lvl="1"/>
             <a:r>
               <a:rPr lang="en-US" sz="2000" dirty="0" smtClean="0"/>
-              <a:t>natural numbers, lists</a:t>
-            </a:r>
-            <a:r>
-              <a:rPr lang="en-US" sz="2000" dirty="0" smtClean="0"/>
-              <a:t>, </a:t>
-            </a:r>
-            <a:r>
-              <a:rPr lang="en-US" sz="2000" dirty="0" smtClean="0"/>
-              <a:t>trees, program syntax</a:t>
+              <a:t>natural numbers, lists, trees, program syntax</a:t>
             </a:r>
           </a:p>
           <a:p>
@@ -9155,15 +9069,7 @@
                   <a:schemeClr val="tx2"/>
                 </a:solidFill>
               </a:rPr>
-              <a:t>to </a:t>
-            </a:r>
-            <a:r>
-              <a:rPr lang="en-US" sz="2400" b="1" dirty="0" smtClean="0">
-                <a:solidFill>
-                  <a:schemeClr val="tx2"/>
-                </a:solidFill>
-              </a:rPr>
-              <a:t>formalize a simple imperative programming language</a:t>
+              <a:t>to formalize a simple imperative programming language</a:t>
             </a:r>
           </a:p>
           <a:p>
@@ -9182,21 +9088,12 @@
               </a:rPr>
               <a:t>to make programs secure with information-flow control</a:t>
             </a:r>
-            <a:endParaRPr lang="en-US" sz="2400" b="1" dirty="0" smtClean="0">
-              <a:solidFill>
-                <a:schemeClr val="tx2"/>
-              </a:solidFill>
-            </a:endParaRPr>
           </a:p>
           <a:p>
             <a:pPr lvl="1"/>
             <a:r>
               <a:rPr lang="en-US" sz="2066" dirty="0" smtClean="0"/>
-              <a:t>enforcing noninterference statically or </a:t>
-            </a:r>
-            <a:r>
-              <a:rPr lang="en-US" sz="2066" dirty="0" smtClean="0"/>
-              <a:t>dynamically</a:t>
+              <a:t>enforcing noninterference statically or dynamically</a:t>
             </a:r>
           </a:p>
           <a:p>
@@ -9212,7 +9109,6 @@
               <a:rPr lang="en-US" sz="2066" dirty="0" smtClean="0"/>
               <a:t>(optional for BSc students)</a:t>
             </a:r>
-            <a:endParaRPr lang="en-US" sz="2066" dirty="0" smtClean="0"/>
           </a:p>
         </p:txBody>
       </p:sp>
@@ -9785,13 +9681,8 @@
           <a:p>
             <a:r>
               <a:rPr lang="en-US" sz="2400" b="1" dirty="0" smtClean="0"/>
-              <a:t>Course based on two </a:t>
-            </a:r>
-            <a:r>
-              <a:rPr lang="en-US" sz="2400" b="1" dirty="0" smtClean="0"/>
-              <a:t>textbook volumes</a:t>
-            </a:r>
-            <a:endParaRPr lang="en-US" sz="2400" b="1" dirty="0" smtClean="0"/>
+              <a:t>Course based on two textbook volumes</a:t>
+            </a:r>
           </a:p>
           <a:p>
             <a:pPr lvl="1"/>
@@ -9822,17 +9713,12 @@
               <a:rPr lang="en-US" sz="2000" dirty="0" smtClean="0"/>
               <a:t>from very simple to more challenging ones</a:t>
             </a:r>
-            <a:endParaRPr lang="en-US" sz="2000" dirty="0" smtClean="0"/>
           </a:p>
           <a:p>
             <a:pPr lvl="1"/>
             <a:r>
               <a:rPr lang="en-US" sz="2000" dirty="0" smtClean="0"/>
-              <a:t>our </a:t>
-            </a:r>
-            <a:r>
-              <a:rPr lang="en-US" sz="2000" dirty="0" smtClean="0"/>
-              <a:t>volume versions </a:t>
+              <a:t>our volume versions </a:t>
             </a:r>
             <a:r>
               <a:rPr lang="en-US" sz="2000" dirty="0"/>
@@ -11199,34 +11085,14 @@
           <a:p>
             <a:r>
               <a:rPr lang="en-US" sz="2000" b="1" dirty="0" smtClean="0"/>
-              <a:t>New exercise sheet will be released on Moodle after </a:t>
-            </a:r>
-            <a:r>
-              <a:rPr lang="en-US" sz="2000" b="1" dirty="0" smtClean="0"/>
-              <a:t>all </a:t>
-            </a:r>
-            <a:r>
-              <a:rPr lang="en-US" sz="2000" b="1" dirty="0" smtClean="0"/>
-              <a:t>courses</a:t>
+              <a:t>New exercise sheet will be released on Moodle after all courses</a:t>
             </a:r>
           </a:p>
           <a:p>
             <a:pPr lvl="1"/>
             <a:r>
               <a:rPr lang="en-US" sz="1800" dirty="0" smtClean="0"/>
-              <a:t>there </a:t>
-            </a:r>
-            <a:r>
-              <a:rPr lang="en-US" sz="1800" dirty="0" smtClean="0"/>
-              <a:t>will be around </a:t>
-            </a:r>
-            <a:r>
-              <a:rPr lang="en-US" sz="1800" dirty="0" smtClean="0"/>
-              <a:t>13 </a:t>
-            </a:r>
-            <a:r>
-              <a:rPr lang="en-US" sz="1800" dirty="0" smtClean="0"/>
-              <a:t>exercise sheets in total</a:t>
+              <a:t>there will be around 13 exercise sheets in total</a:t>
             </a:r>
           </a:p>
           <a:p>
@@ -11253,7 +11119,6 @@
               <a:rPr lang="en-US" sz="1800" b="1" u="sng" dirty="0" smtClean="0"/>
               <a:t>AM</a:t>
             </a:r>
-            <a:endParaRPr lang="en-US" sz="1800" b="1" u="sng" dirty="0" smtClean="0"/>
           </a:p>
           <a:p>
             <a:r>
@@ -13747,7 +13612,7 @@
         <p:spPr>
           <a:xfrm>
             <a:off x="1462316" y="4621768"/>
-            <a:ext cx="5898281" cy="369332"/>
+            <a:ext cx="6140335" cy="369332"/>
           </a:xfrm>
           <a:prstGeom prst="rect">
             <a:avLst/>
@@ -13770,7 +13635,15 @@
             </a:r>
             <a:r>
               <a:rPr lang="en-US" b="1" dirty="0" smtClean="0"/>
-              <a:t>, you need 50% to pass and get credit,</a:t>
+              <a:t>, you need </a:t>
+            </a:r>
+            <a:r>
+              <a:rPr lang="en-US" b="1" dirty="0" smtClean="0"/>
+              <a:t>49.01% </a:t>
+            </a:r>
+            <a:r>
+              <a:rPr lang="en-US" b="1" dirty="0" smtClean="0"/>
+              <a:t>to pass and get credit,</a:t>
             </a:r>
             <a:endParaRPr lang="en-US" b="1" dirty="0"/>
           </a:p>
@@ -13785,7 +13658,7 @@
         <p:spPr>
           <a:xfrm>
             <a:off x="2438400" y="5002768"/>
-            <a:ext cx="4637488" cy="369332"/>
+            <a:ext cx="4932441" cy="369332"/>
           </a:xfrm>
           <a:prstGeom prst="rect">
             <a:avLst/>
@@ -13804,7 +13677,19 @@
             </a:r>
             <a:r>
               <a:rPr lang="en-US" b="1" dirty="0" smtClean="0"/>
-              <a:t>you need at least 95% to get highest grade</a:t>
+              <a:t>you need at </a:t>
+            </a:r>
+            <a:r>
+              <a:rPr lang="en-US" b="1" smtClean="0"/>
+              <a:t>least </a:t>
+            </a:r>
+            <a:r>
+              <a:rPr lang="en-US" b="1" smtClean="0"/>
+              <a:t>94.01% </a:t>
+            </a:r>
+            <a:r>
+              <a:rPr lang="en-US" b="1" dirty="0" smtClean="0"/>
+              <a:t>to get highest grade</a:t>
             </a:r>
             <a:endParaRPr lang="en-US" b="1" dirty="0"/>
           </a:p>
@@ -20611,7 +20496,6 @@
               <a:rPr lang="en-US" sz="2066" dirty="0" smtClean="0"/>
               <a:t>Formerly known as Coq (which in French means rooster)</a:t>
             </a:r>
-            <a:endParaRPr lang="en-US" sz="2066" dirty="0" smtClean="0"/>
           </a:p>
           <a:p>
             <a:r>
@@ -20719,19 +20603,11 @@
             <a:pPr lvl="1"/>
             <a:r>
               <a:rPr lang="en-US" sz="2400" b="1" dirty="0" smtClean="0"/>
-              <a:t>Curry-Howard </a:t>
-            </a:r>
-            <a:r>
-              <a:rPr lang="en-US" sz="2400" b="1" dirty="0" smtClean="0"/>
-              <a:t>correspondence (two extra chapters)</a:t>
+              <a:t>Curry-Howard correspondence (two extra chapters)</a:t>
             </a:r>
             <a:r>
               <a:rPr lang="en-US" sz="2400" dirty="0" smtClean="0"/>
               <a:t>:</a:t>
-            </a:r>
-            <a:r>
-              <a:rPr lang="en-US" sz="2400" dirty="0" smtClean="0"/>
-              <a:t/>
             </a:r>
             <a:br>
               <a:rPr lang="en-US" sz="2400" dirty="0" smtClean="0"/>
@@ -20746,11 +20622,7 @@
             </a:r>
             <a:r>
               <a:rPr lang="en-US" sz="2400" dirty="0" smtClean="0"/>
-              <a:t>functional </a:t>
-            </a:r>
-            <a:r>
-              <a:rPr lang="en-US" sz="2400" dirty="0" smtClean="0"/>
-              <a:t>programming</a:t>
+              <a:t>functional programming</a:t>
             </a:r>
             <a:endParaRPr lang="en-US" sz="2400" dirty="0"/>
           </a:p>
@@ -20868,27 +20740,7 @@
                   </a:schemeClr>
                 </a:solidFill>
               </a:rPr>
-              <a:t>["Le </a:t>
-            </a:r>
-            <a:r>
-              <a:rPr lang="en-US" sz="1200" dirty="0" smtClean="0">
-                <a:solidFill>
-                  <a:schemeClr val="bg1">
-                    <a:lumMod val="50000"/>
-                  </a:schemeClr>
-                </a:solidFill>
-              </a:rPr>
-              <a:t>Coq </a:t>
-            </a:r>
-            <a:r>
-              <a:rPr lang="en-US" sz="1200" dirty="0" smtClean="0">
-                <a:solidFill>
-                  <a:schemeClr val="bg1">
-                    <a:lumMod val="50000"/>
-                  </a:schemeClr>
-                </a:solidFill>
-              </a:rPr>
-              <a:t>mécanisé"</a:t>
+              <a:t>["Le Coq mécanisé"</a:t>
             </a:r>
             <a:br>
               <a:rPr lang="en-US" sz="1200" dirty="0" smtClean="0">
@@ -21501,11 +21353,7 @@
             </a:pPr>
             <a:r>
               <a:rPr lang="en-US" sz="2334" b="1" dirty="0" smtClean="0"/>
-              <a:t>BSc course </a:t>
-            </a:r>
-            <a:r>
-              <a:rPr lang="en-US" sz="2334" b="1" dirty="0" smtClean="0"/>
-              <a:t>previous semester using OCaml</a:t>
+              <a:t>BSc course previous semester using OCaml</a:t>
             </a:r>
             <a:r>
               <a:rPr lang="en-US" sz="2000" b="1" dirty="0" smtClean="0"/>
